--- a/presentation/SeverFoods-presentation.pptx
+++ b/presentation/SeverFoods-presentation.pptx
@@ -2955,7 +2955,7 @@
         <p:spPr>
           <a:xfrm>
             <a:off x="822960" y="2057400"/>
-            <a:ext cx="8686800" cy="1005840"/>
+            <a:ext cx="6309360" cy="1005840"/>
           </a:xfrm>
           <a:prstGeom prst="rect">
             <a:avLst/>
@@ -2975,9 +2975,9 @@
                 <a:solidFill>
                   <a:srgbClr val="FFFFFF"/>
                 </a:solidFill>
-                <a:latin typeface="Cambria" pitchFamily="34" charset="0"/>
-                <a:ea typeface="Cambria" pitchFamily="34" charset="-122"/>
-                <a:cs typeface="Cambria" pitchFamily="34" charset="-120"/>
+                <a:latin typeface="Arial" pitchFamily="34" charset="0"/>
+                <a:ea typeface="Arial" pitchFamily="34" charset="-122"/>
+                <a:cs typeface="Arial" pitchFamily="34" charset="-120"/>
               </a:rPr>
               <a:t>СеверФудс</a:t>
             </a:r>
@@ -2994,7 +2994,7 @@
         <p:spPr>
           <a:xfrm>
             <a:off x="822960" y="3063240"/>
-            <a:ext cx="7863840" cy="822960"/>
+            <a:ext cx="6309360" cy="868680"/>
           </a:xfrm>
           <a:prstGeom prst="rect">
             <a:avLst/>
@@ -3013,7 +3013,7 @@
               <a:buNone/>
             </a:pPr>
             <a:r>
-              <a:rPr lang="en-US" sz="2000" dirty="0">
+              <a:rPr lang="en-US" sz="1900" dirty="0">
                 <a:solidFill>
                   <a:srgbClr val="A8C0DA"/>
                 </a:solidFill>
@@ -3023,7 +3023,7 @@
               </a:rPr>
               <a:t>Система учёта питания сотрудников на производственных площадках</a:t>
             </a:r>
-            <a:endParaRPr lang="en-US" sz="2000" dirty="0"/>
+            <a:endParaRPr lang="en-US" sz="1900" dirty="0"/>
           </a:p>
         </p:txBody>
       </p:sp>
@@ -3333,9 +3333,9 @@
                 <a:solidFill>
                   <a:srgbClr val="003366"/>
                 </a:solidFill>
-                <a:latin typeface="Cambria" pitchFamily="34" charset="0"/>
-                <a:ea typeface="Cambria" pitchFamily="34" charset="-122"/>
-                <a:cs typeface="Cambria" pitchFamily="34" charset="-120"/>
+                <a:latin typeface="Arial" pitchFamily="34" charset="0"/>
+                <a:ea typeface="Arial" pitchFamily="34" charset="-122"/>
+                <a:cs typeface="Arial" pitchFamily="34" charset="-120"/>
               </a:rPr>
               <a:t>Мультиплатформенность</a:t>
             </a:r>
@@ -4098,9 +4098,9 @@
                 <a:solidFill>
                   <a:srgbClr val="003366"/>
                 </a:solidFill>
-                <a:latin typeface="Cambria" pitchFamily="34" charset="0"/>
-                <a:ea typeface="Cambria" pitchFamily="34" charset="-122"/>
-                <a:cs typeface="Cambria" pitchFamily="34" charset="-120"/>
+                <a:latin typeface="Arial" pitchFamily="34" charset="0"/>
+                <a:ea typeface="Arial" pitchFamily="34" charset="-122"/>
+                <a:cs typeface="Arial" pitchFamily="34" charset="-120"/>
               </a:rPr>
               <a:t>Смарт-терминал Эвотор 7.3</a:t>
             </a:r>
@@ -4602,9 +4602,9 @@
                 <a:solidFill>
                   <a:srgbClr val="003366"/>
                 </a:solidFill>
-                <a:latin typeface="Cambria" pitchFamily="34" charset="0"/>
-                <a:ea typeface="Cambria" pitchFamily="34" charset="-122"/>
-                <a:cs typeface="Cambria" pitchFamily="34" charset="-120"/>
+                <a:latin typeface="Arial" pitchFamily="34" charset="0"/>
+                <a:ea typeface="Arial" pitchFamily="34" charset="-122"/>
+                <a:cs typeface="Arial" pitchFamily="34" charset="-120"/>
               </a:rPr>
               <a:t>Карты-пропуска сотрудников</a:t>
             </a:r>
@@ -5172,9 +5172,9 @@
                 <a:solidFill>
                   <a:srgbClr val="003366"/>
                 </a:solidFill>
-                <a:latin typeface="Cambria" pitchFamily="34" charset="0"/>
-                <a:ea typeface="Cambria" pitchFamily="34" charset="-122"/>
-                <a:cs typeface="Cambria" pitchFamily="34" charset="-120"/>
+                <a:latin typeface="Arial" pitchFamily="34" charset="0"/>
+                <a:ea typeface="Arial" pitchFamily="34" charset="-122"/>
+                <a:cs typeface="Arial" pitchFamily="34" charset="-120"/>
               </a:rPr>
               <a:t>Серверная часть: веб-интерфейс</a:t>
             </a:r>
@@ -5284,9 +5284,9 @@
                 <a:solidFill>
                   <a:srgbClr val="003366"/>
                 </a:solidFill>
-                <a:latin typeface="Cambria" pitchFamily="34" charset="0"/>
-                <a:ea typeface="Cambria" pitchFamily="34" charset="-122"/>
-                <a:cs typeface="Cambria" pitchFamily="34" charset="-120"/>
+                <a:latin typeface="Arial" pitchFamily="34" charset="0"/>
+                <a:ea typeface="Arial" pitchFamily="34" charset="-122"/>
+                <a:cs typeface="Arial" pitchFamily="34" charset="-120"/>
               </a:rPr>
               <a:t>Сотрудники</a:t>
             </a:r>
@@ -5463,9 +5463,9 @@
                 <a:solidFill>
                   <a:srgbClr val="003366"/>
                 </a:solidFill>
-                <a:latin typeface="Cambria" pitchFamily="34" charset="0"/>
-                <a:ea typeface="Cambria" pitchFamily="34" charset="-122"/>
-                <a:cs typeface="Cambria" pitchFamily="34" charset="-120"/>
+                <a:latin typeface="Arial" pitchFamily="34" charset="0"/>
+                <a:ea typeface="Arial" pitchFamily="34" charset="-122"/>
+                <a:cs typeface="Arial" pitchFamily="34" charset="-120"/>
               </a:rPr>
               <a:t>Точки и расписание</a:t>
             </a:r>
@@ -5642,9 +5642,9 @@
                 <a:solidFill>
                   <a:srgbClr val="003366"/>
                 </a:solidFill>
-                <a:latin typeface="Cambria" pitchFamily="34" charset="0"/>
-                <a:ea typeface="Cambria" pitchFamily="34" charset="-122"/>
-                <a:cs typeface="Cambria" pitchFamily="34" charset="-120"/>
+                <a:latin typeface="Arial" pitchFamily="34" charset="0"/>
+                <a:ea typeface="Arial" pitchFamily="34" charset="-122"/>
+                <a:cs typeface="Arial" pitchFamily="34" charset="-120"/>
               </a:rPr>
               <a:t>Отчёты</a:t>
             </a:r>
@@ -5821,9 +5821,9 @@
                 <a:solidFill>
                   <a:srgbClr val="003366"/>
                 </a:solidFill>
-                <a:latin typeface="Cambria" pitchFamily="34" charset="0"/>
-                <a:ea typeface="Cambria" pitchFamily="34" charset="-122"/>
-                <a:cs typeface="Cambria" pitchFamily="34" charset="-120"/>
+                <a:latin typeface="Arial" pitchFamily="34" charset="0"/>
+                <a:ea typeface="Arial" pitchFamily="34" charset="-122"/>
+                <a:cs typeface="Arial" pitchFamily="34" charset="-120"/>
               </a:rPr>
               <a:t>Обслуживание</a:t>
             </a:r>
@@ -6113,9 +6113,9 @@
                 <a:solidFill>
                   <a:srgbClr val="003366"/>
                 </a:solidFill>
-                <a:latin typeface="Cambria" pitchFamily="34" charset="0"/>
-                <a:ea typeface="Cambria" pitchFamily="34" charset="-122"/>
-                <a:cs typeface="Cambria" pitchFamily="34" charset="-120"/>
+                <a:latin typeface="Arial" pitchFamily="34" charset="0"/>
+                <a:ea typeface="Arial" pitchFamily="34" charset="-122"/>
+                <a:cs typeface="Arial" pitchFamily="34" charset="-120"/>
               </a:rPr>
               <a:t>Отчётность</a:t>
             </a:r>
@@ -6156,7 +6156,7 @@
                 <a:ea typeface="Calibri" pitchFamily="34" charset="-122"/>
                 <a:cs typeface="Calibri" pitchFamily="34" charset="-120"/>
               </a:rPr>
-              <a:t>То, ради чего всё и делается: достоверный счёт по каждой организации</a:t>
+              <a:t>Счёт по каждой организации и человеку · данные на снимке демонстрационные</a:t>
             </a:r>
             <a:endParaRPr lang="en-US" sz="1500" dirty="0"/>
           </a:p>
@@ -6178,8 +6178,8 @@
         </p:blipFill>
         <p:spPr>
           <a:xfrm>
-            <a:off x="594360" y="1737360"/>
-            <a:ext cx="10972800" cy="3218688"/>
+            <a:off x="795528" y="1737360"/>
+            <a:ext cx="10607040" cy="3547872"/>
           </a:xfrm>
           <a:prstGeom prst="rect">
             <a:avLst/>
@@ -6201,24 +6201,24 @@
         </p:nvSpPr>
         <p:spPr>
           <a:xfrm>
-            <a:off x="594360" y="5120640"/>
-            <a:ext cx="3520440" cy="292608"/>
-          </a:xfrm>
-          <a:prstGeom prst="rect">
-            <a:avLst/>
-          </a:prstGeom>
-          <a:noFill/>
-          <a:ln/>
-        </p:spPr>
-        <p:txBody>
-          <a:bodyPr wrap="square" lIns="0" tIns="0" rIns="0" bIns="0" rtlCol="0" anchor="ctr"/>
-          <a:lstStyle/>
-          <a:p>
-            <a:pPr indent="0" marL="0">
-              <a:buNone/>
-            </a:pPr>
-            <a:r>
-              <a:rPr lang="en-US" sz="1400" b="1" dirty="0">
+            <a:off x="795528" y="5440680"/>
+            <a:ext cx="2651760" cy="292608"/>
+          </a:xfrm>
+          <a:prstGeom prst="rect">
+            <a:avLst/>
+          </a:prstGeom>
+          <a:noFill/>
+          <a:ln/>
+        </p:spPr>
+        <p:txBody>
+          <a:bodyPr wrap="square" lIns="0" tIns="0" rIns="0" bIns="0" rtlCol="0" anchor="ctr"/>
+          <a:lstStyle/>
+          <a:p>
+            <a:pPr indent="0" marL="0">
+              <a:buNone/>
+            </a:pPr>
+            <a:r>
+              <a:rPr lang="en-US" sz="1350" b="1" dirty="0">
                 <a:solidFill>
                   <a:srgbClr val="003366"/>
                 </a:solidFill>
@@ -6228,7 +6228,7 @@
               </a:rPr>
               <a:t>По сотруднику</a:t>
             </a:r>
-            <a:endParaRPr lang="en-US" sz="1400" dirty="0"/>
+            <a:endParaRPr lang="en-US" sz="1350" dirty="0"/>
           </a:p>
         </p:txBody>
       </p:sp>
@@ -6240,8 +6240,8 @@
         </p:nvSpPr>
         <p:spPr>
           <a:xfrm>
-            <a:off x="594360" y="5422392"/>
-            <a:ext cx="3520440" cy="685800"/>
+            <a:off x="795528" y="5733288"/>
+            <a:ext cx="2651760" cy="713232"/>
           </a:xfrm>
           <a:prstGeom prst="rect">
             <a:avLst/>
@@ -6255,12 +6255,12 @@
           <a:p>
             <a:pPr indent="0" marL="0">
               <a:lnSpc>
-                <a:spcPct val="115000"/>
+                <a:spcPct val="112000"/>
               </a:lnSpc>
               <a:buNone/>
             </a:pPr>
             <a:r>
-              <a:rPr lang="en-US" sz="1150" dirty="0">
+              <a:rPr lang="en-US" sz="1100" dirty="0">
                 <a:solidFill>
                   <a:srgbClr val="0F172A"/>
                 </a:solidFill>
@@ -6268,9 +6268,9 @@
                 <a:ea typeface="Calibri" pitchFamily="34" charset="-122"/>
                 <a:cs typeface="Calibri" pitchFamily="34" charset="-120"/>
               </a:rPr>
-              <a:t>Завтраки, обеды, ужины, ночное, всего приёмов и сколько дней человек появлялся в столовой.</a:t>
-            </a:r>
-            <a:endParaRPr lang="en-US" sz="1150" dirty="0"/>
+              <a:t>Завтраки, обеды, ужины, ночное, всего приёмов и дней в столовой.</a:t>
+            </a:r>
+            <a:endParaRPr lang="en-US" sz="1100" dirty="0"/>
           </a:p>
         </p:txBody>
       </p:sp>
@@ -6282,24 +6282,24 @@
         </p:nvSpPr>
         <p:spPr>
           <a:xfrm>
-            <a:off x="4343400" y="5120640"/>
-            <a:ext cx="3520440" cy="292608"/>
-          </a:xfrm>
-          <a:prstGeom prst="rect">
-            <a:avLst/>
-          </a:prstGeom>
-          <a:noFill/>
-          <a:ln/>
-        </p:spPr>
-        <p:txBody>
-          <a:bodyPr wrap="square" lIns="0" tIns="0" rIns="0" bIns="0" rtlCol="0" anchor="ctr"/>
-          <a:lstStyle/>
-          <a:p>
-            <a:pPr indent="0" marL="0">
-              <a:buNone/>
-            </a:pPr>
-            <a:r>
-              <a:rPr lang="en-US" sz="1400" b="1" dirty="0">
+            <a:off x="3584448" y="5440680"/>
+            <a:ext cx="2651760" cy="292608"/>
+          </a:xfrm>
+          <a:prstGeom prst="rect">
+            <a:avLst/>
+          </a:prstGeom>
+          <a:noFill/>
+          <a:ln/>
+        </p:spPr>
+        <p:txBody>
+          <a:bodyPr wrap="square" lIns="0" tIns="0" rIns="0" bIns="0" rtlCol="0" anchor="ctr"/>
+          <a:lstStyle/>
+          <a:p>
+            <a:pPr indent="0" marL="0">
+              <a:buNone/>
+            </a:pPr>
+            <a:r>
+              <a:rPr lang="en-US" sz="1350" b="1" dirty="0">
                 <a:solidFill>
                   <a:srgbClr val="003366"/>
                 </a:solidFill>
@@ -6309,7 +6309,7 @@
               </a:rPr>
               <a:t>По организации</a:t>
             </a:r>
-            <a:endParaRPr lang="en-US" sz="1400" dirty="0"/>
+            <a:endParaRPr lang="en-US" sz="1350" dirty="0"/>
           </a:p>
         </p:txBody>
       </p:sp>
@@ -6321,8 +6321,8 @@
         </p:nvSpPr>
         <p:spPr>
           <a:xfrm>
-            <a:off x="4343400" y="5422392"/>
-            <a:ext cx="3520440" cy="685800"/>
+            <a:off x="3584448" y="5733288"/>
+            <a:ext cx="2651760" cy="713232"/>
           </a:xfrm>
           <a:prstGeom prst="rect">
             <a:avLst/>
@@ -6336,12 +6336,12 @@
           <a:p>
             <a:pPr indent="0" marL="0">
               <a:lnSpc>
-                <a:spcPct val="115000"/>
+                <a:spcPct val="112000"/>
               </a:lnSpc>
               <a:buNone/>
             </a:pPr>
             <a:r>
-              <a:rPr lang="en-US" sz="1150" dirty="0">
+              <a:rPr lang="en-US" sz="1100" dirty="0">
                 <a:solidFill>
                   <a:srgbClr val="0F172A"/>
                 </a:solidFill>
@@ -6349,9 +6349,9 @@
                 <a:ea typeface="Calibri" pitchFamily="34" charset="-122"/>
                 <a:cs typeface="Calibri" pitchFamily="34" charset="-120"/>
               </a:rPr>
-              <a:t>Итоги по каждому подрядчику и общий итог — основание для счёта.</a:t>
-            </a:r>
-            <a:endParaRPr lang="en-US" sz="1150" dirty="0"/>
+              <a:t>Итоги по подрядчику и общий итог — основание для счёта.</a:t>
+            </a:r>
+            <a:endParaRPr lang="en-US" sz="1100" dirty="0"/>
           </a:p>
         </p:txBody>
       </p:sp>
@@ -6363,24 +6363,24 @@
         </p:nvSpPr>
         <p:spPr>
           <a:xfrm>
-            <a:off x="8092440" y="5120640"/>
-            <a:ext cx="3520440" cy="292608"/>
-          </a:xfrm>
-          <a:prstGeom prst="rect">
-            <a:avLst/>
-          </a:prstGeom>
-          <a:noFill/>
-          <a:ln/>
-        </p:spPr>
-        <p:txBody>
-          <a:bodyPr wrap="square" lIns="0" tIns="0" rIns="0" bIns="0" rtlCol="0" anchor="ctr"/>
-          <a:lstStyle/>
-          <a:p>
-            <a:pPr indent="0" marL="0">
-              <a:buNone/>
-            </a:pPr>
-            <a:r>
-              <a:rPr lang="en-US" sz="1400" b="1" dirty="0">
+            <a:off x="6373368" y="5440680"/>
+            <a:ext cx="2651760" cy="292608"/>
+          </a:xfrm>
+          <a:prstGeom prst="rect">
+            <a:avLst/>
+          </a:prstGeom>
+          <a:noFill/>
+          <a:ln/>
+        </p:spPr>
+        <p:txBody>
+          <a:bodyPr wrap="square" lIns="0" tIns="0" rIns="0" bIns="0" rtlCol="0" anchor="ctr"/>
+          <a:lstStyle/>
+          <a:p>
+            <a:pPr indent="0" marL="0">
+              <a:buNone/>
+            </a:pPr>
+            <a:r>
+              <a:rPr lang="en-US" sz="1350" b="1" dirty="0">
                 <a:solidFill>
                   <a:srgbClr val="003366"/>
                 </a:solidFill>
@@ -6390,7 +6390,7 @@
               </a:rPr>
               <a:t>Фильтры</a:t>
             </a:r>
-            <a:endParaRPr lang="en-US" sz="1400" dirty="0"/>
+            <a:endParaRPr lang="en-US" sz="1350" dirty="0"/>
           </a:p>
         </p:txBody>
       </p:sp>
@@ -6402,8 +6402,8 @@
         </p:nvSpPr>
         <p:spPr>
           <a:xfrm>
-            <a:off x="8092440" y="5422392"/>
-            <a:ext cx="3520440" cy="685800"/>
+            <a:off x="6373368" y="5733288"/>
+            <a:ext cx="2651760" cy="713232"/>
           </a:xfrm>
           <a:prstGeom prst="rect">
             <a:avLst/>
@@ -6417,12 +6417,12 @@
           <a:p>
             <a:pPr indent="0" marL="0">
               <a:lnSpc>
-                <a:spcPct val="115000"/>
+                <a:spcPct val="112000"/>
               </a:lnSpc>
               <a:buNone/>
             </a:pPr>
             <a:r>
-              <a:rPr lang="en-US" sz="1150" dirty="0">
+              <a:rPr lang="en-US" sz="1100" dirty="0">
                 <a:solidFill>
                   <a:srgbClr val="0F172A"/>
                 </a:solidFill>
@@ -6430,9 +6430,9 @@
                 <a:ea typeface="Calibri" pitchFamily="34" charset="-122"/>
                 <a:cs typeface="Calibri" pitchFamily="34" charset="-120"/>
               </a:rPr>
-              <a:t>Период, точка, тип питания, способ проводки, выбранные организации, поиск по ФИО.</a:t>
-            </a:r>
-            <a:endParaRPr lang="en-US" sz="1150" dirty="0"/>
+              <a:t>Период, точка, тип питания, способ проводки, организации, ФИО.</a:t>
+            </a:r>
+            <a:endParaRPr lang="en-US" sz="1100" dirty="0"/>
           </a:p>
         </p:txBody>
       </p:sp>
@@ -6444,34 +6444,76 @@
         </p:nvSpPr>
         <p:spPr>
           <a:xfrm>
-            <a:off x="594360" y="6172200"/>
-            <a:ext cx="5486400" cy="320040"/>
-          </a:xfrm>
-          <a:prstGeom prst="rect">
-            <a:avLst/>
-          </a:prstGeom>
-          <a:noFill/>
-          <a:ln/>
-        </p:spPr>
-        <p:txBody>
-          <a:bodyPr wrap="square" lIns="0" tIns="0" rIns="0" bIns="0" rtlCol="0" anchor="ctr"/>
-          <a:lstStyle/>
-          <a:p>
-            <a:pPr indent="0" marL="0">
-              <a:buNone/>
-            </a:pPr>
-            <a:r>
-              <a:rPr lang="en-US" sz="1050" i="1" dirty="0">
-                <a:solidFill>
-                  <a:srgbClr val="5B6B7F"/>
-                </a:solidFill>
-                <a:latin typeface="Calibri" pitchFamily="34" charset="0"/>
-                <a:ea typeface="Calibri" pitchFamily="34" charset="-122"/>
-                <a:cs typeface="Calibri" pitchFamily="34" charset="-120"/>
-              </a:rPr>
-              <a:t>Данные на снимке экрана демонстрационные.</a:t>
-            </a:r>
-            <a:endParaRPr lang="en-US" sz="1050" dirty="0"/>
+            <a:off x="9162288" y="5440680"/>
+            <a:ext cx="2651760" cy="292608"/>
+          </a:xfrm>
+          <a:prstGeom prst="rect">
+            <a:avLst/>
+          </a:prstGeom>
+          <a:noFill/>
+          <a:ln/>
+        </p:spPr>
+        <p:txBody>
+          <a:bodyPr wrap="square" lIns="0" tIns="0" rIns="0" bIns="0" rtlCol="0" anchor="ctr"/>
+          <a:lstStyle/>
+          <a:p>
+            <a:pPr indent="0" marL="0">
+              <a:buNone/>
+            </a:pPr>
+            <a:r>
+              <a:rPr lang="en-US" sz="1350" b="1" dirty="0">
+                <a:solidFill>
+                  <a:srgbClr val="003366"/>
+                </a:solidFill>
+                <a:latin typeface="Calibri" pitchFamily="34" charset="0"/>
+                <a:ea typeface="Calibri" pitchFamily="34" charset="-122"/>
+                <a:cs typeface="Calibri" pitchFamily="34" charset="-120"/>
+              </a:rPr>
+              <a:t>Выгрузка в Excel</a:t>
+            </a:r>
+            <a:endParaRPr lang="en-US" sz="1350" dirty="0"/>
+          </a:p>
+        </p:txBody>
+      </p:sp>
+      <p:sp>
+        <p:nvSpPr>
+          <p:cNvPr id="12" name="Text 9"/>
+          <p:cNvSpPr txBox="1"/>
+          <p:nvPr/>
+        </p:nvSpPr>
+        <p:spPr>
+          <a:xfrm>
+            <a:off x="9162288" y="5733288"/>
+            <a:ext cx="2651760" cy="713232"/>
+          </a:xfrm>
+          <a:prstGeom prst="rect">
+            <a:avLst/>
+          </a:prstGeom>
+          <a:noFill/>
+          <a:ln/>
+        </p:spPr>
+        <p:txBody>
+          <a:bodyPr wrap="square" lIns="0" tIns="0" rIns="0" bIns="0" rtlCol="0" anchor="ctr"/>
+          <a:lstStyle/>
+          <a:p>
+            <a:pPr indent="0" marL="0">
+              <a:lnSpc>
+                <a:spcPct val="112000"/>
+              </a:lnSpc>
+              <a:buNone/>
+            </a:pPr>
+            <a:r>
+              <a:rPr lang="en-US" sz="1100" dirty="0">
+                <a:solidFill>
+                  <a:srgbClr val="0F172A"/>
+                </a:solidFill>
+                <a:latin typeface="Calibri" pitchFamily="34" charset="0"/>
+                <a:ea typeface="Calibri" pitchFamily="34" charset="-122"/>
+                <a:cs typeface="Calibri" pitchFamily="34" charset="-120"/>
+              </a:rPr>
+              <a:t>С теми же фильтрами, что и на экране.</a:t>
+            </a:r>
+            <a:endParaRPr lang="en-US" sz="1100" dirty="0"/>
           </a:p>
         </p:txBody>
       </p:sp>
@@ -6536,9 +6578,9 @@
                 <a:solidFill>
                   <a:srgbClr val="003366"/>
                 </a:solidFill>
-                <a:latin typeface="Cambria" pitchFamily="34" charset="0"/>
-                <a:ea typeface="Cambria" pitchFamily="34" charset="-122"/>
-                <a:cs typeface="Cambria" pitchFamily="34" charset="-120"/>
+                <a:latin typeface="Arial" pitchFamily="34" charset="0"/>
+                <a:ea typeface="Arial" pitchFamily="34" charset="-122"/>
+                <a:cs typeface="Arial" pitchFamily="34" charset="-120"/>
               </a:rPr>
               <a:t>Выгрузки и сухой паёк</a:t>
             </a:r>
@@ -7145,9 +7187,9 @@
                 <a:solidFill>
                   <a:srgbClr val="003366"/>
                 </a:solidFill>
-                <a:latin typeface="Cambria" pitchFamily="34" charset="0"/>
-                <a:ea typeface="Cambria" pitchFamily="34" charset="-122"/>
-                <a:cs typeface="Cambria" pitchFamily="34" charset="-120"/>
+                <a:latin typeface="Arial" pitchFamily="34" charset="0"/>
+                <a:ea typeface="Arial" pitchFamily="34" charset="-122"/>
+                <a:cs typeface="Arial" pitchFamily="34" charset="-120"/>
               </a:rPr>
               <a:t>Роли и разграничение доступа</a:t>
             </a:r>
@@ -7257,9 +7299,9 @@
                 <a:solidFill>
                   <a:srgbClr val="003366"/>
                 </a:solidFill>
-                <a:latin typeface="Cambria" pitchFamily="34" charset="0"/>
-                <a:ea typeface="Cambria" pitchFamily="34" charset="-122"/>
-                <a:cs typeface="Cambria" pitchFamily="34" charset="-120"/>
+                <a:latin typeface="Arial" pitchFamily="34" charset="0"/>
+                <a:ea typeface="Arial" pitchFamily="34" charset="-122"/>
+                <a:cs typeface="Arial" pitchFamily="34" charset="-120"/>
               </a:rPr>
               <a:t>Оператор</a:t>
             </a:r>
@@ -7454,9 +7496,9 @@
                 <a:solidFill>
                   <a:srgbClr val="003366"/>
                 </a:solidFill>
-                <a:latin typeface="Cambria" pitchFamily="34" charset="0"/>
-                <a:ea typeface="Cambria" pitchFamily="34" charset="-122"/>
-                <a:cs typeface="Cambria" pitchFamily="34" charset="-120"/>
+                <a:latin typeface="Arial" pitchFamily="34" charset="0"/>
+                <a:ea typeface="Arial" pitchFamily="34" charset="-122"/>
+                <a:cs typeface="Arial" pitchFamily="34" charset="-120"/>
               </a:rPr>
               <a:t>Администратор</a:t>
             </a:r>
@@ -7672,9 +7714,9 @@
                 <a:solidFill>
                   <a:srgbClr val="003366"/>
                 </a:solidFill>
-                <a:latin typeface="Cambria" pitchFamily="34" charset="0"/>
-                <a:ea typeface="Cambria" pitchFamily="34" charset="-122"/>
-                <a:cs typeface="Cambria" pitchFamily="34" charset="-120"/>
+                <a:latin typeface="Arial" pitchFamily="34" charset="0"/>
+                <a:ea typeface="Arial" pitchFamily="34" charset="-122"/>
+                <a:cs typeface="Arial" pitchFamily="34" charset="-120"/>
               </a:rPr>
               <a:t>Супер-администратор</a:t>
             </a:r>
@@ -7927,9 +7969,9 @@
                 <a:solidFill>
                   <a:srgbClr val="003366"/>
                 </a:solidFill>
-                <a:latin typeface="Cambria" pitchFamily="34" charset="0"/>
-                <a:ea typeface="Cambria" pitchFamily="34" charset="-122"/>
-                <a:cs typeface="Cambria" pitchFamily="34" charset="-120"/>
+                <a:latin typeface="Arial" pitchFamily="34" charset="0"/>
+                <a:ea typeface="Arial" pitchFamily="34" charset="-122"/>
+                <a:cs typeface="Arial" pitchFamily="34" charset="-120"/>
               </a:rPr>
               <a:t>Центр управления площадками</a:t>
             </a:r>
@@ -8431,9 +8473,9 @@
                 <a:solidFill>
                   <a:srgbClr val="003366"/>
                 </a:solidFill>
-                <a:latin typeface="Cambria" pitchFamily="34" charset="0"/>
-                <a:ea typeface="Cambria" pitchFamily="34" charset="-122"/>
-                <a:cs typeface="Cambria" pitchFamily="34" charset="-120"/>
+                <a:latin typeface="Arial" pitchFamily="34" charset="0"/>
+                <a:ea typeface="Arial" pitchFamily="34" charset="-122"/>
+                <a:cs typeface="Arial" pitchFamily="34" charset="-120"/>
               </a:rPr>
               <a:t>Наблюдение за точками и поддержка</a:t>
             </a:r>
@@ -9001,9 +9043,9 @@
                 <a:solidFill>
                   <a:srgbClr val="FFFFFF"/>
                 </a:solidFill>
-                <a:latin typeface="Cambria" pitchFamily="34" charset="0"/>
-                <a:ea typeface="Cambria" pitchFamily="34" charset="-122"/>
-                <a:cs typeface="Cambria" pitchFamily="34" charset="-120"/>
+                <a:latin typeface="Arial" pitchFamily="34" charset="0"/>
+                <a:ea typeface="Arial" pitchFamily="34" charset="-122"/>
+                <a:cs typeface="Arial" pitchFamily="34" charset="-120"/>
               </a:rPr>
               <a:t>Достоверность данных</a:t>
             </a:r>
@@ -9759,9 +9801,9 @@
                 <a:solidFill>
                   <a:srgbClr val="003366"/>
                 </a:solidFill>
-                <a:latin typeface="Cambria" pitchFamily="34" charset="0"/>
-                <a:ea typeface="Cambria" pitchFamily="34" charset="-122"/>
-                <a:cs typeface="Cambria" pitchFamily="34" charset="-120"/>
+                <a:latin typeface="Arial" pitchFamily="34" charset="0"/>
+                <a:ea typeface="Arial" pitchFamily="34" charset="-122"/>
+                <a:cs typeface="Arial" pitchFamily="34" charset="-120"/>
               </a:rPr>
               <a:t>Как учитывают питание сегодня</a:t>
             </a:r>
@@ -9816,12 +9858,12 @@
         </p:nvSpPr>
         <p:spPr>
           <a:xfrm>
-            <a:off x="594360" y="1783080"/>
-            <a:ext cx="2651760" cy="2606040"/>
+            <a:off x="594360" y="1737360"/>
+            <a:ext cx="2651760" cy="2697480"/>
           </a:xfrm>
           <a:prstGeom prst="roundRect">
             <a:avLst>
-              <a:gd name="adj" fmla="val 4211"/>
+              <a:gd name="adj" fmla="val 4138"/>
             </a:avLst>
           </a:prstGeom>
           <a:solidFill>
@@ -9850,8 +9892,8 @@
         </p:nvSpPr>
         <p:spPr>
           <a:xfrm>
-            <a:off x="850392" y="1993392"/>
-            <a:ext cx="457200" cy="457200"/>
+            <a:off x="850392" y="1965960"/>
+            <a:ext cx="512064" cy="512064"/>
           </a:xfrm>
           <a:prstGeom prst="ellipse">
             <a:avLst/>
@@ -9875,8 +9917,8 @@
         </p:nvSpPr>
         <p:spPr>
           <a:xfrm>
-            <a:off x="850392" y="1993392"/>
-            <a:ext cx="457200" cy="457200"/>
+            <a:off x="850392" y="1965960"/>
+            <a:ext cx="512064" cy="512064"/>
           </a:xfrm>
           <a:prstGeom prst="rect">
             <a:avLst/>
@@ -9914,7 +9956,7 @@
         </p:nvSpPr>
         <p:spPr>
           <a:xfrm>
-            <a:off x="850392" y="2560320"/>
+            <a:off x="850392" y="2606040"/>
             <a:ext cx="2148840" cy="457200"/>
           </a:xfrm>
           <a:prstGeom prst="rect">
@@ -9953,7 +9995,7 @@
         </p:nvSpPr>
         <p:spPr>
           <a:xfrm>
-            <a:off x="850392" y="3035808"/>
+            <a:off x="850392" y="3081528"/>
             <a:ext cx="2148840" cy="1481328"/>
           </a:xfrm>
           <a:prstGeom prst="rect">
@@ -9995,12 +10037,12 @@
         </p:nvSpPr>
         <p:spPr>
           <a:xfrm>
-            <a:off x="3383280" y="1783080"/>
-            <a:ext cx="2651760" cy="2606040"/>
+            <a:off x="3383280" y="1737360"/>
+            <a:ext cx="2651760" cy="2697480"/>
           </a:xfrm>
           <a:prstGeom prst="roundRect">
             <a:avLst>
-              <a:gd name="adj" fmla="val 4211"/>
+              <a:gd name="adj" fmla="val 4138"/>
             </a:avLst>
           </a:prstGeom>
           <a:solidFill>
@@ -10029,8 +10071,8 @@
         </p:nvSpPr>
         <p:spPr>
           <a:xfrm>
-            <a:off x="3639312" y="1993392"/>
-            <a:ext cx="457200" cy="457200"/>
+            <a:off x="3639312" y="1965960"/>
+            <a:ext cx="512064" cy="512064"/>
           </a:xfrm>
           <a:prstGeom prst="ellipse">
             <a:avLst/>
@@ -10054,8 +10096,8 @@
         </p:nvSpPr>
         <p:spPr>
           <a:xfrm>
-            <a:off x="3639312" y="1993392"/>
-            <a:ext cx="457200" cy="457200"/>
+            <a:off x="3639312" y="1965960"/>
+            <a:ext cx="512064" cy="512064"/>
           </a:xfrm>
           <a:prstGeom prst="rect">
             <a:avLst/>
@@ -10093,7 +10135,7 @@
         </p:nvSpPr>
         <p:spPr>
           <a:xfrm>
-            <a:off x="3639312" y="2560320"/>
+            <a:off x="3639312" y="2606040"/>
             <a:ext cx="2148840" cy="457200"/>
           </a:xfrm>
           <a:prstGeom prst="rect">
@@ -10132,7 +10174,7 @@
         </p:nvSpPr>
         <p:spPr>
           <a:xfrm>
-            <a:off x="3639312" y="3035808"/>
+            <a:off x="3639312" y="3081528"/>
             <a:ext cx="2148840" cy="1481328"/>
           </a:xfrm>
           <a:prstGeom prst="rect">
@@ -10174,12 +10216,12 @@
         </p:nvSpPr>
         <p:spPr>
           <a:xfrm>
-            <a:off x="6172200" y="1783080"/>
-            <a:ext cx="2651760" cy="2606040"/>
+            <a:off x="6172200" y="1737360"/>
+            <a:ext cx="2651760" cy="2697480"/>
           </a:xfrm>
           <a:prstGeom prst="roundRect">
             <a:avLst>
-              <a:gd name="adj" fmla="val 4211"/>
+              <a:gd name="adj" fmla="val 4138"/>
             </a:avLst>
           </a:prstGeom>
           <a:solidFill>
@@ -10208,8 +10250,8 @@
         </p:nvSpPr>
         <p:spPr>
           <a:xfrm>
-            <a:off x="6428232" y="1993392"/>
-            <a:ext cx="457200" cy="457200"/>
+            <a:off x="6428232" y="1965960"/>
+            <a:ext cx="512064" cy="512064"/>
           </a:xfrm>
           <a:prstGeom prst="ellipse">
             <a:avLst/>
@@ -10233,8 +10275,8 @@
         </p:nvSpPr>
         <p:spPr>
           <a:xfrm>
-            <a:off x="6428232" y="1993392"/>
-            <a:ext cx="457200" cy="457200"/>
+            <a:off x="6428232" y="1965960"/>
+            <a:ext cx="512064" cy="512064"/>
           </a:xfrm>
           <a:prstGeom prst="rect">
             <a:avLst/>
@@ -10272,7 +10314,7 @@
         </p:nvSpPr>
         <p:spPr>
           <a:xfrm>
-            <a:off x="6428232" y="2560320"/>
+            <a:off x="6428232" y="2606040"/>
             <a:ext cx="2148840" cy="457200"/>
           </a:xfrm>
           <a:prstGeom prst="rect">
@@ -10311,7 +10353,7 @@
         </p:nvSpPr>
         <p:spPr>
           <a:xfrm>
-            <a:off x="6428232" y="3035808"/>
+            <a:off x="6428232" y="3081528"/>
             <a:ext cx="2148840" cy="1481328"/>
           </a:xfrm>
           <a:prstGeom prst="rect">
@@ -10353,12 +10395,12 @@
         </p:nvSpPr>
         <p:spPr>
           <a:xfrm>
-            <a:off x="8961120" y="1783080"/>
-            <a:ext cx="2651760" cy="2606040"/>
+            <a:off x="8961120" y="1737360"/>
+            <a:ext cx="2651760" cy="2697480"/>
           </a:xfrm>
           <a:prstGeom prst="roundRect">
             <a:avLst>
-              <a:gd name="adj" fmla="val 4211"/>
+              <a:gd name="adj" fmla="val 4138"/>
             </a:avLst>
           </a:prstGeom>
           <a:solidFill>
@@ -10387,8 +10429,8 @@
         </p:nvSpPr>
         <p:spPr>
           <a:xfrm>
-            <a:off x="9217152" y="1993392"/>
-            <a:ext cx="457200" cy="457200"/>
+            <a:off x="9217152" y="1965960"/>
+            <a:ext cx="512064" cy="512064"/>
           </a:xfrm>
           <a:prstGeom prst="ellipse">
             <a:avLst/>
@@ -10412,8 +10454,8 @@
         </p:nvSpPr>
         <p:spPr>
           <a:xfrm>
-            <a:off x="9217152" y="1993392"/>
-            <a:ext cx="457200" cy="457200"/>
+            <a:off x="9217152" y="1965960"/>
+            <a:ext cx="512064" cy="512064"/>
           </a:xfrm>
           <a:prstGeom prst="rect">
             <a:avLst/>
@@ -10451,7 +10493,7 @@
         </p:nvSpPr>
         <p:spPr>
           <a:xfrm>
-            <a:off x="9217152" y="2560320"/>
+            <a:off x="9217152" y="2606040"/>
             <a:ext cx="2148840" cy="457200"/>
           </a:xfrm>
           <a:prstGeom prst="rect">
@@ -10490,7 +10532,7 @@
         </p:nvSpPr>
         <p:spPr>
           <a:xfrm>
-            <a:off x="9217152" y="3035808"/>
+            <a:off x="9217152" y="3081528"/>
             <a:ext cx="2148840" cy="1481328"/>
           </a:xfrm>
           <a:prstGeom prst="rect">
@@ -10532,7 +10574,7 @@
         </p:nvSpPr>
         <p:spPr>
           <a:xfrm>
-            <a:off x="594360" y="4800600"/>
+            <a:off x="594360" y="4892040"/>
             <a:ext cx="11002975" cy="457200"/>
           </a:xfrm>
           <a:prstGeom prst="rect">
@@ -10624,9 +10666,9 @@
                 <a:solidFill>
                   <a:srgbClr val="003366"/>
                 </a:solidFill>
-                <a:latin typeface="Cambria" pitchFamily="34" charset="0"/>
-                <a:ea typeface="Cambria" pitchFamily="34" charset="-122"/>
-                <a:cs typeface="Cambria" pitchFamily="34" charset="-120"/>
+                <a:latin typeface="Arial" pitchFamily="34" charset="0"/>
+                <a:ea typeface="Arial" pitchFamily="34" charset="-122"/>
+                <a:cs typeface="Arial" pitchFamily="34" charset="-120"/>
               </a:rPr>
               <a:t>Персональные данные</a:t>
             </a:r>
@@ -11309,9 +11351,9 @@
                 <a:solidFill>
                   <a:srgbClr val="003366"/>
                 </a:solidFill>
-                <a:latin typeface="Cambria" pitchFamily="34" charset="0"/>
-                <a:ea typeface="Cambria" pitchFamily="34" charset="-122"/>
-                <a:cs typeface="Cambria" pitchFamily="34" charset="-120"/>
+                <a:latin typeface="Arial" pitchFamily="34" charset="0"/>
+                <a:ea typeface="Arial" pitchFamily="34" charset="-122"/>
+                <a:cs typeface="Arial" pitchFamily="34" charset="-120"/>
               </a:rPr>
               <a:t>Как проходит внедрение</a:t>
             </a:r>
@@ -12493,9 +12535,9 @@
                 <a:solidFill>
                   <a:srgbClr val="003366"/>
                 </a:solidFill>
-                <a:latin typeface="Cambria" pitchFamily="34" charset="0"/>
-                <a:ea typeface="Cambria" pitchFamily="34" charset="-122"/>
-                <a:cs typeface="Cambria" pitchFamily="34" charset="-120"/>
+                <a:latin typeface="Arial" pitchFamily="34" charset="0"/>
+                <a:ea typeface="Arial" pitchFamily="34" charset="-122"/>
+                <a:cs typeface="Arial" pitchFamily="34" charset="-120"/>
               </a:rPr>
               <a:t>Технические требования</a:t>
             </a:r>
@@ -13320,9 +13362,9 @@
                 <a:solidFill>
                   <a:srgbClr val="003366"/>
                 </a:solidFill>
-                <a:latin typeface="Cambria" pitchFamily="34" charset="0"/>
-                <a:ea typeface="Cambria" pitchFamily="34" charset="-122"/>
-                <a:cs typeface="Cambria" pitchFamily="34" charset="-120"/>
+                <a:latin typeface="Arial" pitchFamily="34" charset="0"/>
+                <a:ea typeface="Arial" pitchFamily="34" charset="-122"/>
+                <a:cs typeface="Arial" pitchFamily="34" charset="-120"/>
               </a:rPr>
               <a:t>Что получает заказчик</a:t>
             </a:r>
@@ -14170,9 +14212,9 @@
                 <a:solidFill>
                   <a:srgbClr val="FFFFFF"/>
                 </a:solidFill>
-                <a:latin typeface="Cambria" pitchFamily="34" charset="0"/>
-                <a:ea typeface="Cambria" pitchFamily="34" charset="-122"/>
-                <a:cs typeface="Cambria" pitchFamily="34" charset="-120"/>
+                <a:latin typeface="Arial" pitchFamily="34" charset="0"/>
+                <a:ea typeface="Arial" pitchFamily="34" charset="-122"/>
+                <a:cs typeface="Arial" pitchFamily="34" charset="-120"/>
               </a:rPr>
               <a:t>СеверФудс</a:t>
             </a:r>
@@ -14314,9 +14356,9 @@
                 <a:solidFill>
                   <a:srgbClr val="FFFFFF"/>
                 </a:solidFill>
-                <a:latin typeface="Cambria" pitchFamily="34" charset="0"/>
-                <a:ea typeface="Cambria" pitchFamily="34" charset="-122"/>
-                <a:cs typeface="Cambria" pitchFamily="34" charset="-120"/>
+                <a:latin typeface="Arial" pitchFamily="34" charset="0"/>
+                <a:ea typeface="Arial" pitchFamily="34" charset="-122"/>
+                <a:cs typeface="Arial" pitchFamily="34" charset="-120"/>
               </a:rPr>
               <a:t>ООО «Север»</a:t>
             </a:r>
@@ -14506,9 +14548,9 @@
                 <a:solidFill>
                   <a:srgbClr val="003366"/>
                 </a:solidFill>
-                <a:latin typeface="Cambria" pitchFamily="34" charset="0"/>
-                <a:ea typeface="Cambria" pitchFamily="34" charset="-122"/>
-                <a:cs typeface="Cambria" pitchFamily="34" charset="-120"/>
+                <a:latin typeface="Arial" pitchFamily="34" charset="0"/>
+                <a:ea typeface="Arial" pitchFamily="34" charset="-122"/>
+                <a:cs typeface="Arial" pitchFamily="34" charset="-120"/>
               </a:rPr>
               <a:t>Как это работает</a:t>
             </a:r>
@@ -15506,9 +15548,9 @@
                 <a:solidFill>
                   <a:srgbClr val="003366"/>
                 </a:solidFill>
-                <a:latin typeface="Cambria" pitchFamily="34" charset="0"/>
-                <a:ea typeface="Cambria" pitchFamily="34" charset="-122"/>
-                <a:cs typeface="Cambria" pitchFamily="34" charset="-120"/>
+                <a:latin typeface="Arial" pitchFamily="34" charset="0"/>
+                <a:ea typeface="Arial" pitchFamily="34" charset="-122"/>
+                <a:cs typeface="Arial" pitchFamily="34" charset="-120"/>
               </a:rPr>
               <a:t>Из чего состоит система</a:t>
             </a:r>
@@ -15618,9 +15660,9 @@
                 <a:solidFill>
                   <a:srgbClr val="003366"/>
                 </a:solidFill>
-                <a:latin typeface="Cambria" pitchFamily="34" charset="0"/>
-                <a:ea typeface="Cambria" pitchFamily="34" charset="-122"/>
-                <a:cs typeface="Cambria" pitchFamily="34" charset="-120"/>
+                <a:latin typeface="Arial" pitchFamily="34" charset="0"/>
+                <a:ea typeface="Arial" pitchFamily="34" charset="-122"/>
+                <a:cs typeface="Arial" pitchFamily="34" charset="-120"/>
               </a:rPr>
               <a:t>Точка раздачи</a:t>
             </a:r>
@@ -15818,9 +15860,9 @@
                 <a:solidFill>
                   <a:srgbClr val="003366"/>
                 </a:solidFill>
-                <a:latin typeface="Cambria" pitchFamily="34" charset="0"/>
-                <a:ea typeface="Cambria" pitchFamily="34" charset="-122"/>
-                <a:cs typeface="Cambria" pitchFamily="34" charset="-120"/>
+                <a:latin typeface="Arial" pitchFamily="34" charset="0"/>
+                <a:ea typeface="Arial" pitchFamily="34" charset="-122"/>
+                <a:cs typeface="Arial" pitchFamily="34" charset="-120"/>
               </a:rPr>
               <a:t>Сервер площадки</a:t>
             </a:r>
@@ -16018,9 +16060,9 @@
                 <a:solidFill>
                   <a:srgbClr val="003366"/>
                 </a:solidFill>
-                <a:latin typeface="Cambria" pitchFamily="34" charset="0"/>
-                <a:ea typeface="Cambria" pitchFamily="34" charset="-122"/>
-                <a:cs typeface="Cambria" pitchFamily="34" charset="-120"/>
+                <a:latin typeface="Arial" pitchFamily="34" charset="0"/>
+                <a:ea typeface="Arial" pitchFamily="34" charset="-122"/>
+                <a:cs typeface="Arial" pitchFamily="34" charset="-120"/>
               </a:rPr>
               <a:t>Центр управления</a:t>
             </a:r>
@@ -16255,9 +16297,9 @@
                 <a:solidFill>
                   <a:srgbClr val="003366"/>
                 </a:solidFill>
-                <a:latin typeface="Cambria" pitchFamily="34" charset="0"/>
-                <a:ea typeface="Cambria" pitchFamily="34" charset="-122"/>
-                <a:cs typeface="Cambria" pitchFamily="34" charset="-120"/>
+                <a:latin typeface="Arial" pitchFamily="34" charset="0"/>
+                <a:ea typeface="Arial" pitchFamily="34" charset="-122"/>
+                <a:cs typeface="Arial" pitchFamily="34" charset="-120"/>
               </a:rPr>
               <a:t>Сценарий на раздаче</a:t>
             </a:r>
@@ -17202,9 +17244,9 @@
                 <a:solidFill>
                   <a:srgbClr val="003366"/>
                 </a:solidFill>
-                <a:latin typeface="Cambria" pitchFamily="34" charset="0"/>
-                <a:ea typeface="Cambria" pitchFamily="34" charset="-122"/>
-                <a:cs typeface="Cambria" pitchFamily="34" charset="-120"/>
+                <a:latin typeface="Arial" pitchFamily="34" charset="0"/>
+                <a:ea typeface="Arial" pitchFamily="34" charset="-122"/>
+                <a:cs typeface="Arial" pitchFamily="34" charset="-120"/>
               </a:rPr>
               <a:t>Три ответа терминала</a:t>
             </a:r>
@@ -17794,9 +17836,9 @@
                 <a:solidFill>
                   <a:srgbClr val="FFFFFF"/>
                 </a:solidFill>
-                <a:latin typeface="Cambria" pitchFamily="34" charset="0"/>
-                <a:ea typeface="Cambria" pitchFamily="34" charset="-122"/>
-                <a:cs typeface="Cambria" pitchFamily="34" charset="-120"/>
+                <a:latin typeface="Arial" pitchFamily="34" charset="0"/>
+                <a:ea typeface="Arial" pitchFamily="34" charset="-122"/>
+                <a:cs typeface="Arial" pitchFamily="34" charset="-120"/>
               </a:rPr>
               <a:t>Столовая не останавливается из-за связи</a:t>
             </a:r>
@@ -18318,9 +18360,9 @@
                 <a:solidFill>
                   <a:srgbClr val="003366"/>
                 </a:solidFill>
-                <a:latin typeface="Cambria" pitchFamily="34" charset="0"/>
-                <a:ea typeface="Cambria" pitchFamily="34" charset="-122"/>
-                <a:cs typeface="Cambria" pitchFamily="34" charset="-120"/>
+                <a:latin typeface="Arial" pitchFamily="34" charset="0"/>
+                <a:ea typeface="Arial" pitchFamily="34" charset="-122"/>
+                <a:cs typeface="Arial" pitchFamily="34" charset="-120"/>
               </a:rPr>
               <a:t>Контроль двойного питания</a:t>
             </a:r>
@@ -18376,11 +18418,11 @@
         <p:spPr>
           <a:xfrm>
             <a:off x="594360" y="1783080"/>
-            <a:ext cx="5212080" cy="1691640"/>
+            <a:ext cx="5212080" cy="1965960"/>
           </a:xfrm>
           <a:prstGeom prst="roundRect">
             <a:avLst>
-              <a:gd name="adj" fmla="val 6486"/>
+              <a:gd name="adj" fmla="val 5581"/>
             </a:avLst>
           </a:prstGeom>
           <a:solidFill>
@@ -18409,7 +18451,7 @@
         </p:nvSpPr>
         <p:spPr>
           <a:xfrm>
-            <a:off x="868680" y="2011680"/>
+            <a:off x="868680" y="2057400"/>
             <a:ext cx="4663440" cy="320040"/>
           </a:xfrm>
           <a:prstGeom prst="rect">
@@ -18426,7 +18468,7 @@
               <a:buNone/>
             </a:pPr>
             <a:r>
-              <a:rPr lang="en-US" sz="1500" b="1" dirty="0">
+              <a:rPr lang="en-US" sz="1550" b="1" dirty="0">
                 <a:solidFill>
                   <a:srgbClr val="003366"/>
                 </a:solidFill>
@@ -18436,7 +18478,7 @@
               </a:rPr>
               <a:t>В пределах точки</a:t>
             </a:r>
-            <a:endParaRPr lang="en-US" sz="1500" dirty="0"/>
+            <a:endParaRPr lang="en-US" sz="1550" dirty="0"/>
           </a:p>
         </p:txBody>
       </p:sp>
@@ -18448,8 +18490,8 @@
         </p:nvSpPr>
         <p:spPr>
           <a:xfrm>
-            <a:off x="868680" y="2350008"/>
-            <a:ext cx="4709160" cy="1051560"/>
+            <a:off x="868680" y="2441448"/>
+            <a:ext cx="4709160" cy="1143000"/>
           </a:xfrm>
           <a:prstGeom prst="rect">
             <a:avLst/>
@@ -18463,12 +18505,12 @@
           <a:p>
             <a:pPr indent="0" marL="0">
               <a:lnSpc>
-                <a:spcPct val="115000"/>
+                <a:spcPct val="118000"/>
               </a:lnSpc>
               <a:buNone/>
             </a:pPr>
             <a:r>
-              <a:rPr lang="en-US" sz="1200" dirty="0">
+              <a:rPr lang="en-US" sz="1250" dirty="0">
                 <a:solidFill>
                   <a:srgbClr val="0F172A"/>
                 </a:solidFill>
@@ -18478,7 +18520,7 @@
               </a:rPr>
               <a:t>Повтор того же приёма пищи в тот же день отклоняется всегда, даже без интернета: терминал видит собственные записи.</a:t>
             </a:r>
-            <a:endParaRPr lang="en-US" sz="1200" dirty="0"/>
+            <a:endParaRPr lang="en-US" sz="1250" dirty="0"/>
           </a:p>
         </p:txBody>
       </p:sp>
@@ -18490,12 +18532,12 @@
         </p:nvSpPr>
         <p:spPr>
           <a:xfrm>
-            <a:off x="594360" y="3657600"/>
-            <a:ext cx="5212080" cy="1691640"/>
+            <a:off x="594360" y="3931920"/>
+            <a:ext cx="5212080" cy="1965960"/>
           </a:xfrm>
           <a:prstGeom prst="roundRect">
             <a:avLst>
-              <a:gd name="adj" fmla="val 6486"/>
+              <a:gd name="adj" fmla="val 5581"/>
             </a:avLst>
           </a:prstGeom>
           <a:solidFill>
@@ -18524,7 +18566,7 @@
         </p:nvSpPr>
         <p:spPr>
           <a:xfrm>
-            <a:off x="868680" y="3886200"/>
+            <a:off x="868680" y="4206240"/>
             <a:ext cx="4663440" cy="320040"/>
           </a:xfrm>
           <a:prstGeom prst="rect">
@@ -18541,7 +18583,7 @@
               <a:buNone/>
             </a:pPr>
             <a:r>
-              <a:rPr lang="en-US" sz="1500" b="1" dirty="0">
+              <a:rPr lang="en-US" sz="1550" b="1" dirty="0">
                 <a:solidFill>
                   <a:srgbClr val="003366"/>
                 </a:solidFill>
@@ -18551,7 +18593,7 @@
               </a:rPr>
               <a:t>Между точками</a:t>
             </a:r>
-            <a:endParaRPr lang="en-US" sz="1500" dirty="0"/>
+            <a:endParaRPr lang="en-US" sz="1550" dirty="0"/>
           </a:p>
         </p:txBody>
       </p:sp>
@@ -18563,8 +18605,8 @@
         </p:nvSpPr>
         <p:spPr>
           <a:xfrm>
-            <a:off x="868680" y="4224528"/>
-            <a:ext cx="4709160" cy="1051560"/>
+            <a:off x="868680" y="4590288"/>
+            <a:ext cx="4709160" cy="1143000"/>
           </a:xfrm>
           <a:prstGeom prst="rect">
             <a:avLst/>
@@ -18578,12 +18620,12 @@
           <a:p>
             <a:pPr indent="0" marL="0">
               <a:lnSpc>
-                <a:spcPct val="115000"/>
+                <a:spcPct val="118000"/>
               </a:lnSpc>
               <a:buNone/>
             </a:pPr>
             <a:r>
-              <a:rPr lang="en-US" sz="1200" dirty="0">
+              <a:rPr lang="en-US" sz="1250" dirty="0">
                 <a:solidFill>
                   <a:srgbClr val="0F172A"/>
                 </a:solidFill>
@@ -18593,7 +18635,7 @@
               </a:rPr>
               <a:t>Если связь есть, терминал спрашивает сервер: не проходил ли человек этот же приём пищи на другой точке. Это важно, когда залы раздачи стоят рядом.</a:t>
             </a:r>
-            <a:endParaRPr lang="en-US" sz="1200" dirty="0"/>
+            <a:endParaRPr lang="en-US" sz="1250" dirty="0"/>
           </a:p>
         </p:txBody>
       </p:sp>
@@ -18606,11 +18648,11 @@
         <p:spPr>
           <a:xfrm>
             <a:off x="6355080" y="1783080"/>
-            <a:ext cx="5212080" cy="1691640"/>
+            <a:ext cx="5212080" cy="1965960"/>
           </a:xfrm>
           <a:prstGeom prst="roundRect">
             <a:avLst>
-              <a:gd name="adj" fmla="val 6486"/>
+              <a:gd name="adj" fmla="val 5581"/>
             </a:avLst>
           </a:prstGeom>
           <a:solidFill>
@@ -18639,7 +18681,7 @@
         </p:nvSpPr>
         <p:spPr>
           <a:xfrm>
-            <a:off x="6629400" y="2011680"/>
+            <a:off x="6629400" y="2057400"/>
             <a:ext cx="4663440" cy="320040"/>
           </a:xfrm>
           <a:prstGeom prst="rect">
@@ -18656,7 +18698,7 @@
               <a:buNone/>
             </a:pPr>
             <a:r>
-              <a:rPr lang="en-US" sz="1500" b="1" dirty="0">
+              <a:rPr lang="en-US" sz="1550" b="1" dirty="0">
                 <a:solidFill>
                   <a:srgbClr val="003366"/>
                 </a:solidFill>
@@ -18666,7 +18708,7 @@
               </a:rPr>
               <a:t>Дубли при синхронизации</a:t>
             </a:r>
-            <a:endParaRPr lang="en-US" sz="1500" dirty="0"/>
+            <a:endParaRPr lang="en-US" sz="1550" dirty="0"/>
           </a:p>
         </p:txBody>
       </p:sp>
@@ -18678,8 +18720,8 @@
         </p:nvSpPr>
         <p:spPr>
           <a:xfrm>
-            <a:off x="6629400" y="2350008"/>
-            <a:ext cx="4709160" cy="1051560"/>
+            <a:off x="6629400" y="2441448"/>
+            <a:ext cx="4709160" cy="1143000"/>
           </a:xfrm>
           <a:prstGeom prst="rect">
             <a:avLst/>
@@ -18693,12 +18735,12 @@
           <a:p>
             <a:pPr indent="0" marL="0">
               <a:lnSpc>
-                <a:spcPct val="115000"/>
+                <a:spcPct val="118000"/>
               </a:lnSpc>
               <a:buNone/>
             </a:pPr>
             <a:r>
-              <a:rPr lang="en-US" sz="1200" dirty="0">
+              <a:rPr lang="en-US" sz="1250" dirty="0">
                 <a:solidFill>
                   <a:srgbClr val="0F172A"/>
                 </a:solidFill>
@@ -18708,7 +18750,7 @@
               </a:rPr>
               <a:t>Повторная отправка той же записи не создаёт вторую строку: сервер распознаёт её по идентификатору и блокировке.</a:t>
             </a:r>
-            <a:endParaRPr lang="en-US" sz="1200" dirty="0"/>
+            <a:endParaRPr lang="en-US" sz="1250" dirty="0"/>
           </a:p>
         </p:txBody>
       </p:sp>
@@ -18720,12 +18762,12 @@
         </p:nvSpPr>
         <p:spPr>
           <a:xfrm>
-            <a:off x="6355080" y="3657600"/>
-            <a:ext cx="5212080" cy="1691640"/>
+            <a:off x="6355080" y="3931920"/>
+            <a:ext cx="5212080" cy="1965960"/>
           </a:xfrm>
           <a:prstGeom prst="roundRect">
             <a:avLst>
-              <a:gd name="adj" fmla="val 6486"/>
+              <a:gd name="adj" fmla="val 5581"/>
             </a:avLst>
           </a:prstGeom>
           <a:solidFill>
@@ -18754,7 +18796,7 @@
         </p:nvSpPr>
         <p:spPr>
           <a:xfrm>
-            <a:off x="6629400" y="3886200"/>
+            <a:off x="6629400" y="4206240"/>
             <a:ext cx="4663440" cy="320040"/>
           </a:xfrm>
           <a:prstGeom prst="rect">
@@ -18771,7 +18813,7 @@
               <a:buNone/>
             </a:pPr>
             <a:r>
-              <a:rPr lang="en-US" sz="1500" b="1" dirty="0">
+              <a:rPr lang="en-US" sz="1550" b="1" dirty="0">
                 <a:solidFill>
                   <a:srgbClr val="003366"/>
                 </a:solidFill>
@@ -18781,7 +18823,7 @@
               </a:rPr>
               <a:t>Поиск дублей в базе</a:t>
             </a:r>
-            <a:endParaRPr lang="en-US" sz="1500" dirty="0"/>
+            <a:endParaRPr lang="en-US" sz="1550" dirty="0"/>
           </a:p>
         </p:txBody>
       </p:sp>
@@ -18793,8 +18835,8 @@
         </p:nvSpPr>
         <p:spPr>
           <a:xfrm>
-            <a:off x="6629400" y="4224528"/>
-            <a:ext cx="4709160" cy="1051560"/>
+            <a:off x="6629400" y="4590288"/>
+            <a:ext cx="4709160" cy="1143000"/>
           </a:xfrm>
           <a:prstGeom prst="rect">
             <a:avLst/>
@@ -18808,12 +18850,12 @@
           <a:p>
             <a:pPr indent="0" marL="0">
               <a:lnSpc>
-                <a:spcPct val="115000"/>
+                <a:spcPct val="118000"/>
               </a:lnSpc>
               <a:buNone/>
             </a:pPr>
             <a:r>
-              <a:rPr lang="en-US" sz="1200" dirty="0">
+              <a:rPr lang="en-US" sz="1250" dirty="0">
                 <a:solidFill>
                   <a:srgbClr val="0F172A"/>
                 </a:solidFill>
@@ -18823,7 +18865,7 @@
               </a:rPr>
               <a:t>Отдельный инструмент находит записи, попавшие в базу разными путями, — например, скан и не удалённый ручной пропуск.</a:t>
             </a:r>
-            <a:endParaRPr lang="en-US" sz="1200" dirty="0"/>
+            <a:endParaRPr lang="en-US" sz="1250" dirty="0"/>
           </a:p>
         </p:txBody>
       </p:sp>
@@ -18835,8 +18877,8 @@
         </p:nvSpPr>
         <p:spPr>
           <a:xfrm>
-            <a:off x="594360" y="5669280"/>
-            <a:ext cx="11002975" cy="365760"/>
+            <a:off x="594360" y="6108192"/>
+            <a:ext cx="11002975" cy="347472"/>
           </a:xfrm>
           <a:prstGeom prst="rect">
             <a:avLst/>
@@ -18927,9 +18969,9 @@
                 <a:solidFill>
                   <a:srgbClr val="003366"/>
                 </a:solidFill>
-                <a:latin typeface="Cambria" pitchFamily="34" charset="0"/>
-                <a:ea typeface="Cambria" pitchFamily="34" charset="-122"/>
-                <a:cs typeface="Cambria" pitchFamily="34" charset="-120"/>
+                <a:latin typeface="Arial" pitchFamily="34" charset="0"/>
+                <a:ea typeface="Arial" pitchFamily="34" charset="-122"/>
+                <a:cs typeface="Arial" pitchFamily="34" charset="-120"/>
               </a:rPr>
               <a:t>Расписание столовой и типы питания</a:t>
             </a:r>
@@ -19039,9 +19081,9 @@
                 <a:solidFill>
                   <a:srgbClr val="003366"/>
                 </a:solidFill>
-                <a:latin typeface="Cambria" pitchFamily="34" charset="0"/>
-                <a:ea typeface="Cambria" pitchFamily="34" charset="-122"/>
-                <a:cs typeface="Cambria" pitchFamily="34" charset="-120"/>
+                <a:latin typeface="Arial" pitchFamily="34" charset="0"/>
+                <a:ea typeface="Arial" pitchFamily="34" charset="-122"/>
+                <a:cs typeface="Arial" pitchFamily="34" charset="-120"/>
               </a:rPr>
               <a:t>Завтрак</a:t>
             </a:r>
@@ -19151,9 +19193,9 @@
                 <a:solidFill>
                   <a:srgbClr val="003366"/>
                 </a:solidFill>
-                <a:latin typeface="Cambria" pitchFamily="34" charset="0"/>
-                <a:ea typeface="Cambria" pitchFamily="34" charset="-122"/>
-                <a:cs typeface="Cambria" pitchFamily="34" charset="-120"/>
+                <a:latin typeface="Arial" pitchFamily="34" charset="0"/>
+                <a:ea typeface="Arial" pitchFamily="34" charset="-122"/>
+                <a:cs typeface="Arial" pitchFamily="34" charset="-120"/>
               </a:rPr>
               <a:t>Обед</a:t>
             </a:r>
@@ -19263,9 +19305,9 @@
                 <a:solidFill>
                   <a:srgbClr val="003366"/>
                 </a:solidFill>
-                <a:latin typeface="Cambria" pitchFamily="34" charset="0"/>
-                <a:ea typeface="Cambria" pitchFamily="34" charset="-122"/>
-                <a:cs typeface="Cambria" pitchFamily="34" charset="-120"/>
+                <a:latin typeface="Arial" pitchFamily="34" charset="0"/>
+                <a:ea typeface="Arial" pitchFamily="34" charset="-122"/>
+                <a:cs typeface="Arial" pitchFamily="34" charset="-120"/>
               </a:rPr>
               <a:t>Ужин</a:t>
             </a:r>
@@ -19375,9 +19417,9 @@
                 <a:solidFill>
                   <a:srgbClr val="003366"/>
                 </a:solidFill>
-                <a:latin typeface="Cambria" pitchFamily="34" charset="0"/>
-                <a:ea typeface="Cambria" pitchFamily="34" charset="-122"/>
-                <a:cs typeface="Cambria" pitchFamily="34" charset="-120"/>
+                <a:latin typeface="Arial" pitchFamily="34" charset="0"/>
+                <a:ea typeface="Arial" pitchFamily="34" charset="-122"/>
+                <a:cs typeface="Arial" pitchFamily="34" charset="-120"/>
               </a:rPr>
               <a:t>Ночное</a:t>
             </a:r>
